--- a/shiori-thumbnail/out/shiori_thumb_C.pptx
+++ b/shiori-thumbnail/out/shiori_thumb_C.pptx
@@ -3199,7 +3199,7 @@
               </a:lnSpc>
             </a:pPr>
             <a:r>
-              <a:rPr sz="1950" spc="450">
+              <a:rPr sz="1950" b="0" spc="450">
                 <a:solidFill>
                   <a:srgbClr val="FFFBF3"/>
                 </a:solidFill>
@@ -3214,14 +3214,14 @@
       </p:sp>
       <p:sp>
         <p:nvSpPr>
-          <p:cNvPr id="6" name="05_メインタイトル"/>
+          <p:cNvPr id="6" name="05_メインタイトル（1行目）"/>
           <p:cNvSpPr txBox="1"/>
           <p:nvPr/>
         </p:nvSpPr>
         <p:spPr>
           <a:xfrm>
-            <a:off x="762000" y="1295400"/>
-            <a:ext cx="9144000" cy="2667000"/>
+            <a:off x="762000" y="1428750"/>
+            <a:ext cx="8953500" cy="1143000"/>
           </a:xfrm>
           <a:prstGeom prst="rect">
             <a:avLst/>
@@ -3236,35 +3236,58 @@
           <a:p>
             <a:pPr algn="l">
               <a:lnSpc>
-                <a:spcPct val="114000"/>
+                <a:spcPct val="100000"/>
               </a:lnSpc>
             </a:pPr>
             <a:r>
-              <a:rPr sz="7650" spc="-150">
+              <a:rPr sz="7650" b="1" spc="-150">
                 <a:solidFill>
                   <a:srgbClr val="FFFBF3"/>
                 </a:solidFill>
-                <a:latin typeface="Shippori Mincho ExtraBold"/>
-                <a:ea typeface="Shippori Mincho ExtraBold"/>
-                <a:cs typeface="Shippori Mincho ExtraBold"/>
+                <a:latin typeface="Shippori Mincho"/>
+                <a:ea typeface="Shippori Mincho"/>
+                <a:cs typeface="Shippori Mincho"/>
               </a:rPr>
               <a:t>いちじくと、</a:t>
             </a:r>
           </a:p>
-          <a:p>
-            <a:pPr algn="l" marL="1219200">
+        </p:txBody>
+      </p:sp>
+      <p:sp>
+        <p:nvSpPr>
+          <p:cNvPr id="7" name="05_メインタイトル（2行目）"/>
+          <p:cNvSpPr txBox="1"/>
+          <p:nvPr/>
+        </p:nvSpPr>
+        <p:spPr>
+          <a:xfrm>
+            <a:off x="1981200" y="2533650"/>
+            <a:ext cx="8191500" cy="1143000"/>
+          </a:xfrm>
+          <a:prstGeom prst="rect">
+            <a:avLst/>
+          </a:prstGeom>
+          <a:noFill/>
+        </p:spPr>
+        <p:txBody>
+          <a:bodyPr wrap="none" lIns="0" rIns="0" tIns="0" bIns="0" anchor="t">
+            <a:noAutofit/>
+          </a:bodyPr>
+          <a:lstStyle/>
+          <a:p>
+            <a:pPr algn="l">
               <a:lnSpc>
-                <a:spcPct val="114000"/>
+                <a:spcPct val="100000"/>
               </a:lnSpc>
             </a:pPr>
             <a:r>
-              <a:rPr sz="7650" spc="-150">
+              <a:rPr sz="7650" b="1" spc="-150">
                 <a:solidFill>
                   <a:srgbClr val="FFFBF3"/>
                 </a:solidFill>
-                <a:latin typeface="Shippori Mincho ExtraBold"/>
-                <a:ea typeface="Shippori Mincho ExtraBold"/>
-                <a:cs typeface="Shippori Mincho ExtraBold"/>
+                <a:latin typeface="Shippori Mincho"/>
+                <a:ea typeface="Shippori Mincho"/>
+                <a:cs typeface="Shippori Mincho"/>
               </a:rPr>
               <a:t>スケッチの午後。</a:t>
             </a:r>
@@ -3273,7 +3296,7 @@
       </p:sp>
       <p:sp>
         <p:nvSpPr>
-          <p:cNvPr id="7" name="06_サブタイトル"/>
+          <p:cNvPr id="8" name="06_サブタイトル"/>
           <p:cNvSpPr txBox="1"/>
           <p:nvPr/>
         </p:nvSpPr>
@@ -3299,7 +3322,7 @@
               </a:lnSpc>
             </a:pPr>
             <a:r>
-              <a:rPr sz="2100" spc="375">
+              <a:rPr sz="2100" b="0" spc="375">
                 <a:solidFill>
                   <a:srgbClr val="FFFBF3"/>
                 </a:solidFill>
